--- a/presentation/crosssell_presentation.pptx
+++ b/presentation/crosssell_presentation.pptx
@@ -2636,7 +2636,7 @@
         <p:spPr>
           <a:xfrm xmlns:a="http://schemas.openxmlformats.org/drawingml/2006/main">
             <a:off x="762000" y="2190750"/>
-            <a:ext cx="4762500" cy="2428875"/>
+            <a:ext cx="4762500" cy="1992629"/>
           </a:xfrm>
           <a:prstGeom xmlns:a="http://schemas.openxmlformats.org/drawingml/2006/main" prst="roundRect">
             <a:avLst>
@@ -2885,7 +2885,7 @@
         <p:spPr>
           <a:xfrm xmlns:a="http://schemas.openxmlformats.org/drawingml/2006/main">
             <a:off x="6667500" y="2190750"/>
-            <a:ext cx="4762500" cy="2428875"/>
+            <a:ext cx="4762500" cy="1992629"/>
           </a:xfrm>
           <a:prstGeom xmlns:a="http://schemas.openxmlformats.org/drawingml/2006/main" prst="roundRect">
             <a:avLst>
@@ -3747,7 +3747,7 @@
             <a:srgbClr val="A31329"/>
           </a:solidFill>
           <a:ln>
-            <a:noFill/>
+            <a:solidFill/>
           </a:ln>
         </p:spPr>
         <p:style>
@@ -3790,7 +3790,7 @@
         <p:spPr>
           <a:xfrm>
             <a:off x="612648" y="3154680"/>
-            <a:ext cx="5330952" cy="2240280"/>
+            <a:ext cx="5330952" cy="1577340"/>
           </a:xfrm>
           <a:prstGeom prst="roundRect">
             <a:avLst/>
@@ -3798,7 +3798,7 @@
           <a:solidFill>
             <a:srgbClr val="FFFFFF"/>
           </a:solidFill>
-          <a:ln>
+          <a:ln w="9525">
             <a:solidFill>
               <a:srgbClr val="DCD7CF"/>
             </a:solidFill>
@@ -3841,6 +3841,9 @@
             <a:avLst/>
           </a:prstGeom>
           <a:noFill/>
+          <a:ln>
+            <a:noFill/>
+          </a:ln>
         </p:spPr>
         <p:txBody>
           <a:bodyPr wrap="none">
@@ -3869,12 +3872,15 @@
         <p:spPr>
           <a:xfrm>
             <a:off x="841248" y="3721608"/>
-            <a:ext cx="4873752" cy="1508760"/>
+            <a:ext cx="4873752" cy="873252"/>
           </a:xfrm>
           <a:prstGeom prst="rect">
             <a:avLst/>
           </a:prstGeom>
           <a:noFill/>
+          <a:ln>
+            <a:noFill/>
+          </a:ln>
         </p:spPr>
         <p:txBody>
           <a:bodyPr wrap="square">
@@ -3903,7 +3909,7 @@
         <p:spPr>
           <a:xfrm>
             <a:off x="6245352" y="3154680"/>
-            <a:ext cx="5330952" cy="2240280"/>
+            <a:ext cx="5330952" cy="1577340"/>
           </a:xfrm>
           <a:prstGeom prst="roundRect">
             <a:avLst/>
@@ -3911,7 +3917,7 @@
           <a:solidFill>
             <a:srgbClr val="FFFFFF"/>
           </a:solidFill>
-          <a:ln>
+          <a:ln w="9525">
             <a:solidFill>
               <a:srgbClr val="DCD7CF"/>
             </a:solidFill>
@@ -3954,6 +3960,9 @@
             <a:avLst/>
           </a:prstGeom>
           <a:noFill/>
+          <a:ln>
+            <a:noFill/>
+          </a:ln>
         </p:spPr>
         <p:txBody>
           <a:bodyPr wrap="none">
@@ -3982,12 +3991,15 @@
         <p:spPr>
           <a:xfrm>
             <a:off x="6473952" y="3721608"/>
-            <a:ext cx="4873752" cy="1508760"/>
+            <a:ext cx="4873752" cy="873252"/>
           </a:xfrm>
           <a:prstGeom prst="rect">
             <a:avLst/>
           </a:prstGeom>
           <a:noFill/>
+          <a:ln>
+            <a:noFill/>
+          </a:ln>
         </p:spPr>
         <p:txBody>
           <a:bodyPr wrap="square">
@@ -5053,7 +5065,7 @@
         <p:spPr>
           <a:xfrm xmlns:a="http://schemas.openxmlformats.org/drawingml/2006/main">
             <a:off x="1371600" y="2152650"/>
-            <a:ext cx="4572000" cy="1783080"/>
+            <a:ext cx="4572000" cy="1562862"/>
           </a:xfrm>
           <a:prstGeom xmlns:a="http://schemas.openxmlformats.org/drawingml/2006/main" prst="roundRect">
             <a:avLst>
@@ -5256,7 +5268,7 @@
         <p:spPr>
           <a:xfrm xmlns:a="http://schemas.openxmlformats.org/drawingml/2006/main">
             <a:off x="6245352" y="2152650"/>
-            <a:ext cx="4572000" cy="1783080"/>
+            <a:ext cx="4572000" cy="1562862"/>
           </a:xfrm>
           <a:prstGeom xmlns:a="http://schemas.openxmlformats.org/drawingml/2006/main" prst="roundRect">
             <a:avLst>
@@ -5569,6 +5581,9 @@
             <a:avLst/>
           </a:prstGeom>
           <a:noFill/>
+          <a:ln>
+            <a:noFill/>
+          </a:ln>
         </p:spPr>
         <p:txBody>
           <a:bodyPr wrap="square">
@@ -5607,7 +5622,7 @@
             <a:srgbClr val="7E94A6"/>
           </a:solidFill>
           <a:ln>
-            <a:noFill/>
+            <a:solidFill/>
           </a:ln>
         </p:spPr>
         <p:style>
@@ -5659,7 +5674,7 @@
             <a:srgbClr val="12A79A"/>
           </a:solidFill>
           <a:ln>
-            <a:noFill/>
+            <a:solidFill/>
           </a:ln>
         </p:spPr>
         <p:style>
@@ -5711,7 +5726,7 @@
             <a:srgbClr val="D4A842"/>
           </a:solidFill>
           <a:ln>
-            <a:noFill/>
+            <a:solidFill/>
           </a:ln>
         </p:spPr>
         <p:style>
@@ -5763,7 +5778,7 @@
             <a:srgbClr val="A31329"/>
           </a:solidFill>
           <a:ln>
-            <a:noFill/>
+            <a:solidFill/>
           </a:ln>
         </p:spPr>
         <p:style>
@@ -5806,7 +5821,7 @@
             <a:srgbClr val="A31329"/>
           </a:solidFill>
           <a:ln>
-            <a:noFill/>
+            <a:solidFill/>
           </a:ln>
         </p:spPr>
         <p:style>
@@ -5855,6 +5870,9 @@
             <a:avLst/>
           </a:prstGeom>
           <a:noFill/>
+          <a:ln>
+            <a:noFill/>
+          </a:ln>
         </p:spPr>
         <p:txBody>
           <a:bodyPr wrap="square">
@@ -5890,6 +5908,9 @@
             <a:avLst/>
           </a:prstGeom>
           <a:noFill/>
+          <a:ln>
+            <a:noFill/>
+          </a:ln>
         </p:spPr>
         <p:txBody>
           <a:bodyPr wrap="square">
@@ -7522,7 +7543,7 @@
         <p:spPr>
           <a:xfrm xmlns:a="http://schemas.openxmlformats.org/drawingml/2006/main">
             <a:off x="857250" y="2381250"/>
-            <a:ext cx="2952750" cy="1143000"/>
+            <a:ext cx="2952750" cy="1418844"/>
           </a:xfrm>
           <a:prstGeom xmlns:a="http://schemas.openxmlformats.org/drawingml/2006/main" prst="roundRect">
             <a:avLst>
@@ -7574,7 +7595,7 @@
           </a:prstGeom>
           <a:noFill xmlns:a="http://schemas.openxmlformats.org/drawingml/2006/main"/>
           <a:ln xmlns:a="http://schemas.openxmlformats.org/drawingml/2006/main" w="0">
-            <a:noFill/>
+            <a:solidFill/>
             <a:prstDash val="solid"/>
           </a:ln>
         </p:spPr>
@@ -7773,7 +7794,7 @@
         <p:spPr>
           <a:xfrm xmlns:a="http://schemas.openxmlformats.org/drawingml/2006/main">
             <a:off x="4619625" y="2381250"/>
-            <a:ext cx="2952750" cy="1143000"/>
+            <a:ext cx="2952750" cy="1418844"/>
           </a:xfrm>
           <a:prstGeom xmlns:a="http://schemas.openxmlformats.org/drawingml/2006/main" prst="roundRect">
             <a:avLst>
@@ -7825,7 +7846,7 @@
           </a:prstGeom>
           <a:noFill xmlns:a="http://schemas.openxmlformats.org/drawingml/2006/main"/>
           <a:ln xmlns:a="http://schemas.openxmlformats.org/drawingml/2006/main" w="0">
-            <a:noFill/>
+            <a:solidFill/>
             <a:prstDash val="solid"/>
           </a:ln>
         </p:spPr>
@@ -8024,7 +8045,7 @@
         <p:spPr>
           <a:xfrm xmlns:a="http://schemas.openxmlformats.org/drawingml/2006/main">
             <a:off x="8382000" y="2381250"/>
-            <a:ext cx="2952750" cy="1143000"/>
+            <a:ext cx="2952750" cy="1418844"/>
           </a:xfrm>
           <a:prstGeom xmlns:a="http://schemas.openxmlformats.org/drawingml/2006/main" prst="roundRect">
             <a:avLst>
@@ -8076,7 +8097,7 @@
           </a:prstGeom>
           <a:noFill xmlns:a="http://schemas.openxmlformats.org/drawingml/2006/main"/>
           <a:ln xmlns:a="http://schemas.openxmlformats.org/drawingml/2006/main" w="0">
-            <a:noFill/>
+            <a:solidFill/>
             <a:prstDash val="solid"/>
           </a:ln>
         </p:spPr>
@@ -8889,7 +8910,7 @@
             <a:srgbClr val="ECE8E1"/>
           </a:solidFill>
           <a:ln>
-            <a:noFill/>
+            <a:solidFill/>
           </a:ln>
         </p:spPr>
         <p:style>
@@ -8932,7 +8953,7 @@
             <a:srgbClr val="D4A842"/>
           </a:solidFill>
           <a:ln>
-            <a:noFill/>
+            <a:solidFill/>
           </a:ln>
         </p:spPr>
         <p:style>
@@ -8972,6 +8993,9 @@
             <a:avLst/>
           </a:prstGeom>
           <a:noFill/>
+          <a:ln>
+            <a:noFill/>
+          </a:ln>
         </p:spPr>
         <p:txBody>
           <a:bodyPr wrap="none">
@@ -9006,6 +9030,9 @@
             <a:avLst/>
           </a:prstGeom>
           <a:noFill/>
+          <a:ln>
+            <a:noFill/>
+          </a:ln>
         </p:spPr>
         <p:txBody>
           <a:bodyPr wrap="none">
@@ -9043,7 +9070,7 @@
             <a:srgbClr val="ECE8E1"/>
           </a:solidFill>
           <a:ln>
-            <a:noFill/>
+            <a:solidFill/>
           </a:ln>
         </p:spPr>
         <p:style>
@@ -9086,7 +9113,7 @@
             <a:srgbClr val="A31329"/>
           </a:solidFill>
           <a:ln>
-            <a:noFill/>
+            <a:solidFill/>
           </a:ln>
         </p:spPr>
         <p:style>
@@ -9126,6 +9153,9 @@
             <a:avLst/>
           </a:prstGeom>
           <a:noFill/>
+          <a:ln>
+            <a:noFill/>
+          </a:ln>
         </p:spPr>
         <p:txBody>
           <a:bodyPr wrap="none">
@@ -9160,6 +9190,9 @@
             <a:avLst/>
           </a:prstGeom>
           <a:noFill/>
+          <a:ln>
+            <a:noFill/>
+          </a:ln>
         </p:spPr>
         <p:txBody>
           <a:bodyPr wrap="none">
@@ -9197,7 +9230,7 @@
             <a:srgbClr val="ECE8E1"/>
           </a:solidFill>
           <a:ln>
-            <a:noFill/>
+            <a:solidFill/>
           </a:ln>
         </p:spPr>
         <p:style>
@@ -9240,7 +9273,7 @@
             <a:srgbClr val="3B82F6"/>
           </a:solidFill>
           <a:ln>
-            <a:noFill/>
+            <a:solidFill/>
           </a:ln>
         </p:spPr>
         <p:style>
@@ -9280,6 +9313,9 @@
             <a:avLst/>
           </a:prstGeom>
           <a:noFill/>
+          <a:ln>
+            <a:noFill/>
+          </a:ln>
         </p:spPr>
         <p:txBody>
           <a:bodyPr wrap="none">
@@ -9314,6 +9350,9 @@
             <a:avLst/>
           </a:prstGeom>
           <a:noFill/>
+          <a:ln>
+            <a:noFill/>
+          </a:ln>
         </p:spPr>
         <p:txBody>
           <a:bodyPr wrap="none">
@@ -9351,7 +9390,7 @@
             <a:srgbClr val="ECE8E1"/>
           </a:solidFill>
           <a:ln>
-            <a:noFill/>
+            <a:solidFill/>
           </a:ln>
         </p:spPr>
         <p:style>
@@ -9394,7 +9433,7 @@
             <a:srgbClr val="12A79A"/>
           </a:solidFill>
           <a:ln>
-            <a:noFill/>
+            <a:solidFill/>
           </a:ln>
         </p:spPr>
         <p:style>
@@ -9434,6 +9473,9 @@
             <a:avLst/>
           </a:prstGeom>
           <a:noFill/>
+          <a:ln>
+            <a:noFill/>
+          </a:ln>
         </p:spPr>
         <p:txBody>
           <a:bodyPr wrap="none">
@@ -9468,6 +9510,9 @@
             <a:avLst/>
           </a:prstGeom>
           <a:noFill/>
+          <a:ln>
+            <a:noFill/>
+          </a:ln>
         </p:spPr>
         <p:txBody>
           <a:bodyPr wrap="none">
@@ -9505,7 +9550,7 @@
             <a:srgbClr val="ECE8E1"/>
           </a:solidFill>
           <a:ln>
-            <a:noFill/>
+            <a:solidFill/>
           </a:ln>
         </p:spPr>
         <p:style>
@@ -9548,7 +9593,7 @@
             <a:srgbClr val="3B82F6"/>
           </a:solidFill>
           <a:ln>
-            <a:noFill/>
+            <a:solidFill/>
           </a:ln>
         </p:spPr>
         <p:style>
@@ -9588,6 +9633,9 @@
             <a:avLst/>
           </a:prstGeom>
           <a:noFill/>
+          <a:ln>
+            <a:noFill/>
+          </a:ln>
         </p:spPr>
         <p:txBody>
           <a:bodyPr wrap="none">
@@ -9622,6 +9670,9 @@
             <a:avLst/>
           </a:prstGeom>
           <a:noFill/>
+          <a:ln>
+            <a:noFill/>
+          </a:ln>
         </p:spPr>
         <p:txBody>
           <a:bodyPr wrap="none">
@@ -9659,7 +9710,7 @@
             <a:srgbClr val="ECE8E1"/>
           </a:solidFill>
           <a:ln>
-            <a:noFill/>
+            <a:solidFill/>
           </a:ln>
         </p:spPr>
         <p:style>
@@ -9702,7 +9753,7 @@
             <a:srgbClr val="6F8FD8"/>
           </a:solidFill>
           <a:ln>
-            <a:noFill/>
+            <a:solidFill/>
           </a:ln>
         </p:spPr>
         <p:style>
@@ -9742,6 +9793,9 @@
             <a:avLst/>
           </a:prstGeom>
           <a:noFill/>
+          <a:ln>
+            <a:noFill/>
+          </a:ln>
         </p:spPr>
         <p:txBody>
           <a:bodyPr wrap="none">
@@ -9776,6 +9830,9 @@
             <a:avLst/>
           </a:prstGeom>
           <a:noFill/>
+          <a:ln>
+            <a:noFill/>
+          </a:ln>
         </p:spPr>
         <p:txBody>
           <a:bodyPr wrap="none">
@@ -9813,7 +9870,7 @@
             <a:srgbClr val="ECE8E1"/>
           </a:solidFill>
           <a:ln>
-            <a:noFill/>
+            <a:solidFill/>
           </a:ln>
         </p:spPr>
         <p:style>
@@ -9856,7 +9913,7 @@
             <a:srgbClr val="687080"/>
           </a:solidFill>
           <a:ln>
-            <a:noFill/>
+            <a:solidFill/>
           </a:ln>
         </p:spPr>
         <p:style>
@@ -9896,6 +9953,9 @@
             <a:avLst/>
           </a:prstGeom>
           <a:noFill/>
+          <a:ln>
+            <a:noFill/>
+          </a:ln>
         </p:spPr>
         <p:txBody>
           <a:bodyPr wrap="none">
@@ -9930,6 +9990,9 @@
             <a:avLst/>
           </a:prstGeom>
           <a:noFill/>
+          <a:ln>
+            <a:noFill/>
+          </a:ln>
         </p:spPr>
         <p:txBody>
           <a:bodyPr wrap="none">
@@ -10375,6 +10438,9 @@
             <a:avLst/>
           </a:prstGeom>
           <a:noFill/>
+          <a:ln>
+            <a:noFill/>
+          </a:ln>
         </p:spPr>
         <p:txBody>
           <a:bodyPr wrap="square">
@@ -10412,7 +10478,7 @@
           <a:solidFill>
             <a:srgbClr val="FFFFFF"/>
           </a:solidFill>
-          <a:ln w="12700">
+          <a:ln w="9525">
             <a:solidFill>
               <a:srgbClr val="DCD7CF"/>
             </a:solidFill>
@@ -10478,7 +10544,7 @@
           <a:solidFill>
             <a:srgbClr val="FFFFFF"/>
           </a:solidFill>
-          <a:ln w="12700">
+          <a:ln w="9525">
             <a:solidFill>
               <a:srgbClr val="DCD7CF"/>
             </a:solidFill>
@@ -10544,7 +10610,7 @@
           <a:solidFill>
             <a:srgbClr val="FFFFFF"/>
           </a:solidFill>
-          <a:ln w="12700">
+          <a:ln w="9525">
             <a:solidFill>
               <a:srgbClr val="DCD7CF"/>
             </a:solidFill>
@@ -10623,7 +10689,7 @@
             <a:srgbClr val="12A79A"/>
           </a:solidFill>
           <a:ln>
-            <a:noFill/>
+            <a:solidFill/>
           </a:ln>
         </p:spPr>
         <p:style>
@@ -10666,7 +10732,7 @@
             <a:srgbClr val="12A79A"/>
           </a:solidFill>
           <a:ln>
-            <a:noFill/>
+            <a:solidFill/>
           </a:ln>
         </p:spPr>
         <p:style>
@@ -10787,7 +10853,7 @@
             <a:srgbClr val="A31329"/>
           </a:solidFill>
           <a:ln>
-            <a:noFill/>
+            <a:solidFill/>
           </a:ln>
         </p:spPr>
         <p:style>
@@ -10830,7 +10896,7 @@
             <a:srgbClr val="A31329"/>
           </a:solidFill>
           <a:ln>
-            <a:noFill/>
+            <a:solidFill/>
           </a:ln>
         </p:spPr>
         <p:style>
@@ -10872,7 +10938,7 @@
           <a:solidFill>
             <a:srgbClr val="FFFFFF"/>
           </a:solidFill>
-          <a:ln w="12700">
+          <a:ln w="9525">
             <a:solidFill>
               <a:srgbClr val="DCD7CF"/>
             </a:solidFill>
@@ -10950,7 +11016,7 @@
           <a:solidFill>
             <a:srgbClr val="FFFFFF"/>
           </a:solidFill>
-          <a:ln w="12700">
+          <a:ln w="9525">
             <a:solidFill>
               <a:srgbClr val="DCD7CF"/>
             </a:solidFill>
@@ -11029,7 +11095,7 @@
             <a:srgbClr val="3B82F6"/>
           </a:solidFill>
           <a:ln>
-            <a:noFill/>
+            <a:solidFill/>
           </a:ln>
         </p:spPr>
         <p:style>
@@ -11072,7 +11138,7 @@
             <a:srgbClr val="D4A842"/>
           </a:solidFill>
           <a:ln>
-            <a:noFill/>
+            <a:solidFill/>
           </a:ln>
         </p:spPr>
         <p:style>

--- a/presentation/crosssell_presentation.pptx
+++ b/presentation/crosssell_presentation.pptx
@@ -3168,7 +3168,7 @@
                 <a:ea typeface="Calibri"/>
                 <a:cs typeface="Calibri"/>
               </a:rPr>
-              <a:t>Пример: ИИ-ревью прошло репозиторий по 5 линзам и нашло незакрытую overlap-проверку — я её доделал и перепроверил. Готовые ИИ-инструменты встраиваю в рабочий процесс и задаю правила их безопасного применения.</a:t>
+              <a:t>Пример: ИИ-ревью прошло репозиторий по 5 линзам и нашло незакрытую overlap-проверку — я ее доделал и перепроверил. Готовые ИИ-инструменты встраиваю в рабочий процесс и задаю правила их безопасного применения.</a:t>
             </a:r>
           </a:p>
         </p:txBody>
@@ -3895,7 +3895,7 @@
                 </a:solidFill>
                 <a:latin typeface="Calibri"/>
               </a:rPr>
-              <a:t>Не весь каталог, а несколько допустимых CrossSell-предложений — сервисы, подписки, финансовые и партнёрские категории. Слотов мало, бюджет скидок ограничен.</a:t>
+              <a:t>Не весь каталог, а несколько допустимых CrossSell-предложений — сервисы, подписки, финансовые и партнерские категории. Слотов мало, бюджет скидок ограничен.</a:t>
             </a:r>
           </a:p>
         </p:txBody>
@@ -4014,7 +4014,7 @@
                 </a:solidFill>
                 <a:latin typeface="Calibri"/>
               </a:rPr>
-              <a:t>Скорим все пары клиент–продукт (вероятность утилизации и uplift) и берём top-3 по бизнес-правилу — без повторов group_id. Полный пайплайн — на слайде «Инженерия».</a:t>
+              <a:t>Скорим все пары клиент–продукт (вероятность утилизации и uplift) и берем top-3 по бизнес-правилу — без повторов group_id. Полный пайплайн — на слайде «Инженерия».</a:t>
             </a:r>
           </a:p>
         </p:txBody>
